--- a/documentos_teoricos/entregable2/entregable2_presentacion.pptx
+++ b/documentos_teoricos/entregable2/entregable2_presentacion.pptx
@@ -4679,7 +4679,7 @@
                 </a:solidFill>
                 <a:latin typeface="Calibri"/>
               </a:rPr>
-              <a:t>Diseño de la solución: aplicación móvil con IA multimodal (Gemma 4) embebida en el teléfono para la declaración mensual del NRUS en bodegas de San Juan de Lurigancho</a:t>
+              <a:t>Aplicación móvil con IA multimodal (Gemma 4) para mejorar la exactitud de la declaración mensual del NRUS en bodegas de S.J.L.</a:t>
             </a:r>
           </a:p>
         </p:txBody>

--- a/documentos_teoricos/entregable2/entregable2_presentacion.pptx
+++ b/documentos_teoricos/entregable2/entregable2_presentacion.pptx
@@ -796,7 +796,7 @@
           <a:lstStyle/>
           <a:p>
             <a:r>
-              <a:t>Fabrizzio: Validamos el diseño con matrices de cobertura. Cada uno de los 22 requerimientos funcionales tiene pantalla, caso de uso, clase y tabla; los 19 no funcionales tienen una decisión de diseño verificable. Hicimos una evaluación heurística con las diez heurísticas de Nielsen y un recorrido de seis tareas, y definimos la prueba con tres titulares para la iteración 3. Devuelvo la palabra a Diego.</a:t>
+              <a:t>Fabrizzio: Validamos el diseño con matrices de cobertura. Cada uno de los 22 requerimientos funcionales tiene pantalla, caso de uso, clase y tabla; los 19 no funcionales tienen una decisión de diseño verificable. Hicimos una evaluación heurística con las diez heurísticas de Nielsen y un recorrido de seis tareas, y definimos la prueba con tres titulares para las semanas 11 y 12, en la iteración 4. Devuelvo la palabra a Diego.</a:t>
             </a:r>
           </a:p>
         </p:txBody>
@@ -8262,7 +8262,7 @@
                 </a:solidFill>
                 <a:latin typeface="Calibri"/>
               </a:rPr>
-              <a:t>Metas de usabilidad (I3)</a:t>
+              <a:t>Metas de usabilidad (I4, sem. 11–12)</a:t>
             </a:r>
           </a:p>
         </p:txBody>
